--- a/literature/First Checkpoint/Methodology_Slide.pptx
+++ b/literature/First Checkpoint/Methodology_Slide.pptx
@@ -2178,8 +2178,8 @@
           </a:p>
         </p:txBody>
       </p:sp>
-      <mc:AlternateContent xmlns:mc="http://schemas.openxmlformats.org/markup-compatibility/2006">
-        <mc:Choice xmlns:a14="http://schemas.microsoft.com/office/drawing/2010/main" Requires="a14">
+      <mc:AlternateContent xmlns:mc="http://schemas.openxmlformats.org/markup-compatibility/2006" xmlns:a14="http://schemas.microsoft.com/office/drawing/2010/main">
+        <mc:Choice Requires="a14">
           <p:sp>
             <p:nvSpPr>
               <p:cNvPr id="4" name="Text 2"/>
@@ -2516,7 +2516,7 @@
             </p:txBody>
           </p:sp>
         </mc:Choice>
-        <mc:Fallback>
+        <mc:Fallback xmlns="">
           <p:sp>
             <p:nvSpPr>
               <p:cNvPr id="4" name="Text 2"/>
@@ -2841,8 +2841,8 @@
         </p:blipFill>
         <p:spPr>
           <a:xfrm>
-            <a:off x="6858446" y="825900"/>
-            <a:ext cx="2222054" cy="1097280"/>
+            <a:off x="479892" y="1316590"/>
+            <a:ext cx="7749708" cy="3826910"/>
           </a:xfrm>
           <a:prstGeom prst="rect">
             <a:avLst/>
@@ -2872,8 +2872,8 @@
         </p:blipFill>
         <p:spPr>
           <a:xfrm>
-            <a:off x="6839884" y="1999180"/>
-            <a:ext cx="2197100" cy="1562711"/>
+            <a:off x="1413510" y="1130500"/>
+            <a:ext cx="5882472" cy="4012225"/>
           </a:xfrm>
           <a:prstGeom prst="rect">
             <a:avLst/>
@@ -2903,8 +2903,8 @@
         </p:blipFill>
         <p:spPr>
           <a:xfrm>
-            <a:off x="6858446" y="3690820"/>
-            <a:ext cx="2178538" cy="1167558"/>
+            <a:off x="664081" y="1140860"/>
+            <a:ext cx="7381330" cy="3955924"/>
           </a:xfrm>
           <a:prstGeom prst="rect">
             <a:avLst/>
@@ -2916,6 +2916,171 @@
   <p:clrMapOvr>
     <a:masterClrMapping/>
   </p:clrMapOvr>
+  <p:timing>
+    <p:tnLst>
+      <p:par>
+        <p:cTn id="1" dur="indefinite" restart="never" nodeType="tmRoot">
+          <p:childTnLst>
+            <p:seq concurrent="1" nextAc="seek">
+              <p:cTn id="2" dur="indefinite" nodeType="mainSeq">
+                <p:childTnLst>
+                  <p:par>
+                    <p:cTn id="3" fill="hold">
+                      <p:stCondLst>
+                        <p:cond delay="indefinite"/>
+                      </p:stCondLst>
+                      <p:childTnLst>
+                        <p:par>
+                          <p:cTn id="4" fill="hold">
+                            <p:stCondLst>
+                              <p:cond delay="0"/>
+                            </p:stCondLst>
+                            <p:childTnLst>
+                              <p:par>
+                                <p:cTn id="5" presetID="1" presetClass="entr" presetSubtype="0" fill="hold" nodeType="clickEffect">
+                                  <p:stCondLst>
+                                    <p:cond delay="0"/>
+                                  </p:stCondLst>
+                                  <p:childTnLst>
+                                    <p:set>
+                                      <p:cBhvr>
+                                        <p:cTn id="6" dur="1" fill="hold">
+                                          <p:stCondLst>
+                                            <p:cond delay="0"/>
+                                          </p:stCondLst>
+                                        </p:cTn>
+                                        <p:tgtEl>
+                                          <p:spTgt spid="11"/>
+                                        </p:tgtEl>
+                                        <p:attrNameLst>
+                                          <p:attrName>style.visibility</p:attrName>
+                                        </p:attrNameLst>
+                                      </p:cBhvr>
+                                      <p:to>
+                                        <p:strVal val="visible"/>
+                                      </p:to>
+                                    </p:set>
+                                  </p:childTnLst>
+                                </p:cTn>
+                              </p:par>
+                            </p:childTnLst>
+                          </p:cTn>
+                        </p:par>
+                      </p:childTnLst>
+                    </p:cTn>
+                  </p:par>
+                  <p:par>
+                    <p:cTn id="7" fill="hold">
+                      <p:stCondLst>
+                        <p:cond delay="indefinite"/>
+                      </p:stCondLst>
+                      <p:childTnLst>
+                        <p:par>
+                          <p:cTn id="8" fill="hold">
+                            <p:stCondLst>
+                              <p:cond delay="0"/>
+                            </p:stCondLst>
+                            <p:childTnLst>
+                              <p:par>
+                                <p:cTn id="9" presetID="1" presetClass="entr" presetSubtype="0" fill="hold" nodeType="clickEffect">
+                                  <p:stCondLst>
+                                    <p:cond delay="0"/>
+                                  </p:stCondLst>
+                                  <p:childTnLst>
+                                    <p:set>
+                                      <p:cBhvr>
+                                        <p:cTn id="10" dur="1" fill="hold">
+                                          <p:stCondLst>
+                                            <p:cond delay="0"/>
+                                          </p:stCondLst>
+                                        </p:cTn>
+                                        <p:tgtEl>
+                                          <p:spTgt spid="12"/>
+                                        </p:tgtEl>
+                                        <p:attrNameLst>
+                                          <p:attrName>style.visibility</p:attrName>
+                                        </p:attrNameLst>
+                                      </p:cBhvr>
+                                      <p:to>
+                                        <p:strVal val="visible"/>
+                                      </p:to>
+                                    </p:set>
+                                  </p:childTnLst>
+                                </p:cTn>
+                              </p:par>
+                            </p:childTnLst>
+                          </p:cTn>
+                        </p:par>
+                      </p:childTnLst>
+                    </p:cTn>
+                  </p:par>
+                  <p:par>
+                    <p:cTn id="11" fill="hold">
+                      <p:stCondLst>
+                        <p:cond delay="indefinite"/>
+                      </p:stCondLst>
+                      <p:childTnLst>
+                        <p:par>
+                          <p:cTn id="12" fill="hold">
+                            <p:stCondLst>
+                              <p:cond delay="0"/>
+                            </p:stCondLst>
+                            <p:childTnLst>
+                              <p:par>
+                                <p:cTn id="13" presetID="1" presetClass="entr" presetSubtype="0" fill="hold" nodeType="clickEffect">
+                                  <p:stCondLst>
+                                    <p:cond delay="0"/>
+                                  </p:stCondLst>
+                                  <p:childTnLst>
+                                    <p:set>
+                                      <p:cBhvr>
+                                        <p:cTn id="14" dur="1" fill="hold">
+                                          <p:stCondLst>
+                                            <p:cond delay="0"/>
+                                          </p:stCondLst>
+                                        </p:cTn>
+                                        <p:tgtEl>
+                                          <p:spTgt spid="13"/>
+                                        </p:tgtEl>
+                                        <p:attrNameLst>
+                                          <p:attrName>style.visibility</p:attrName>
+                                        </p:attrNameLst>
+                                      </p:cBhvr>
+                                      <p:to>
+                                        <p:strVal val="visible"/>
+                                      </p:to>
+                                    </p:set>
+                                  </p:childTnLst>
+                                </p:cTn>
+                              </p:par>
+                            </p:childTnLst>
+                          </p:cTn>
+                        </p:par>
+                      </p:childTnLst>
+                    </p:cTn>
+                  </p:par>
+                </p:childTnLst>
+              </p:cTn>
+              <p:prevCondLst>
+                <p:cond evt="onPrev" delay="0">
+                  <p:tgtEl>
+                    <p:sldTgt/>
+                  </p:tgtEl>
+                </p:cond>
+              </p:prevCondLst>
+              <p:nextCondLst>
+                <p:cond evt="onNext" delay="0">
+                  <p:tgtEl>
+                    <p:sldTgt/>
+                  </p:tgtEl>
+                </p:cond>
+              </p:nextCondLst>
+            </p:seq>
+          </p:childTnLst>
+        </p:cTn>
+      </p:par>
+    </p:tnLst>
+  </p:timing>
 </p:sld>
 </file>
 
@@ -3029,8 +3194,8 @@
           </a:p>
         </p:txBody>
       </p:sp>
-      <mc:AlternateContent xmlns:mc="http://schemas.openxmlformats.org/markup-compatibility/2006">
-        <mc:Choice xmlns:a14="http://schemas.microsoft.com/office/drawing/2010/main" Requires="a14">
+      <mc:AlternateContent xmlns:mc="http://schemas.openxmlformats.org/markup-compatibility/2006" xmlns:a14="http://schemas.microsoft.com/office/drawing/2010/main">
+        <mc:Choice Requires="a14">
           <p:sp>
             <p:nvSpPr>
               <p:cNvPr id="4" name="Text 2">
@@ -3373,7 +3538,7 @@
             </p:txBody>
           </p:sp>
         </mc:Choice>
-        <mc:Fallback>
+        <mc:Fallback xmlns="">
           <p:sp>
             <p:nvSpPr>
               <p:cNvPr id="4" name="Text 2">
@@ -3919,8 +4084,8 @@
           </a:p>
         </p:txBody>
       </p:sp>
-      <mc:AlternateContent xmlns:mc="http://schemas.openxmlformats.org/markup-compatibility/2006">
-        <mc:Choice xmlns:a14="http://schemas.microsoft.com/office/drawing/2010/main" Requires="a14">
+      <mc:AlternateContent xmlns:mc="http://schemas.openxmlformats.org/markup-compatibility/2006" xmlns:a14="http://schemas.microsoft.com/office/drawing/2010/main">
+        <mc:Choice Requires="a14">
           <p:sp>
             <p:nvSpPr>
               <p:cNvPr id="4" name="Text 2">
@@ -4263,7 +4428,7 @@
             </p:txBody>
           </p:sp>
         </mc:Choice>
-        <mc:Fallback>
+        <mc:Fallback xmlns="">
           <p:sp>
             <p:nvSpPr>
               <p:cNvPr id="4" name="Text 2">
@@ -4810,8 +4975,8 @@
           </a:p>
         </p:txBody>
       </p:sp>
-      <mc:AlternateContent xmlns:mc="http://schemas.openxmlformats.org/markup-compatibility/2006">
-        <mc:Choice xmlns:a14="http://schemas.microsoft.com/office/drawing/2010/main" Requires="a14">
+      <mc:AlternateContent xmlns:mc="http://schemas.openxmlformats.org/markup-compatibility/2006" xmlns:a14="http://schemas.microsoft.com/office/drawing/2010/main">
+        <mc:Choice Requires="a14">
           <p:sp>
             <p:nvSpPr>
               <p:cNvPr id="4" name="Text 2">
@@ -5154,7 +5319,7 @@
             </p:txBody>
           </p:sp>
         </mc:Choice>
-        <mc:Fallback>
+        <mc:Fallback xmlns="">
           <p:sp>
             <p:nvSpPr>
               <p:cNvPr id="4" name="Text 2">
